--- a/08-AI_CAMPUS-main/os-day2/운영체제_Day2.pptx
+++ b/08-AI_CAMPUS-main/os-day2/운영체제_Day2.pptx
@@ -4247,7 +4247,7 @@
       <p:sp>
         <p:nvSpPr>
           <p:cNvPr id="9" name="Text 7">
-            <a:hlinkClick r:id="rId1" tooltip="https://imguru-mooc.github.io/AI_CAMPUS/os-day2/anim/index.html"/>
+            <a:hlinkClick r:id="rId1" tooltip="https://devops0906.github.io/AI_CAMPUS/os-day2/anim/index.html"/>
           </p:cNvPr>
           <p:cNvSpPr txBox="1"/>
           <p:nvPr/>
@@ -4275,7 +4275,7 @@
                 <a:solidFill>
                   <a:srgbClr val="1E2761"/>
                 </a:solidFill>
-                <a:hlinkClick r:id="rId1" invalidUrl="" action="" tgtFrame="" tooltip="https://imguru-mooc.github.io/AI_CAMPUS/os-day2/anim/index.html" history="1" highlightClick="0" endSnd="0">
+                <a:hlinkClick r:id="rId1" invalidUrl="" action="" tgtFrame="" tooltip="https://devops0906.github.io/AI_CAMPUS/os-day2/anim/index.html" history="1" highlightClick="0" endSnd="0">
                   <a:extLst>
                     <a:ext uri="{A12FA001-AC4F-418D-AE19-62706E023703}">
                       <ahyp:hlinkClr xmlns:ahyp="http://schemas.microsoft.com/office/drawing/2018/hyperlinkcolor" val="tx"/>
@@ -4319,7 +4319,7 @@
       <p:sp>
         <p:nvSpPr>
           <p:cNvPr id="11" name="Text 9">
-            <a:hlinkClick r:id="rId2" tooltip="https://imguru-mooc.github.io/AI_CAMPUS/os-day2/anim/worksheet.html"/>
+            <a:hlinkClick r:id="rId2" tooltip="https://devops0906.github.io/AI_CAMPUS/os-day2/anim/worksheet.html"/>
           </p:cNvPr>
           <p:cNvSpPr txBox="1"/>
           <p:nvPr/>
@@ -4347,7 +4347,7 @@
                 <a:solidFill>
                   <a:srgbClr val="1E2761"/>
                 </a:solidFill>
-                <a:hlinkClick r:id="rId2" invalidUrl="" action="" tgtFrame="" tooltip="https://imguru-mooc.github.io/AI_CAMPUS/os-day2/anim/worksheet.html" history="1" highlightClick="0" endSnd="0">
+                <a:hlinkClick r:id="rId2" invalidUrl="" action="" tgtFrame="" tooltip="https://devops0906.github.io/AI_CAMPUS/os-day2/anim/worksheet.html" history="1" highlightClick="0" endSnd="0">
                   <a:extLst>
                     <a:ext uri="{A12FA001-AC4F-418D-AE19-62706E023703}">
                       <ahyp:hlinkClr xmlns:ahyp="http://schemas.microsoft.com/office/drawing/2018/hyperlinkcolor" val="tx"/>
@@ -4391,7 +4391,7 @@
                   <a:srgbClr val="8FA0D8"/>
                 </a:solidFill>
               </a:rPr>
-              <a:t>모든 도구·워크시트: imguru-mooc.github.io/AI_CAMPUS/os-day2/anim/</a:t>
+              <a:t>모든 도구·워크시트: devops0906.github.io/AI_CAMPUS/os-day2/anim/</a:t>
             </a:r>
             <a:endParaRPr lang="en-US" sz="1100" dirty="0"/>
           </a:p>
@@ -5251,7 +5251,7 @@
       <p:sp>
         <p:nvSpPr>
           <p:cNvPr id="11" name="Text 9">
-            <a:hlinkClick r:id="rId1" tooltip="https://imguru-mooc.github.io/AI_CAMPUS/os-day2/anim/fork_cpu_memory.html"/>
+            <a:hlinkClick r:id="rId1" tooltip="https://devops0906.github.io/AI_CAMPUS/os-day2/anim/fork_cpu_memory.html"/>
           </p:cNvPr>
           <p:cNvSpPr txBox="1"/>
           <p:nvPr/>
@@ -5279,7 +5279,7 @@
                 <a:solidFill>
                   <a:srgbClr val="1E2761"/>
                 </a:solidFill>
-                <a:hlinkClick r:id="rId1" invalidUrl="" action="" tgtFrame="" tooltip="https://imguru-mooc.github.io/AI_CAMPUS/os-day2/anim/fork_cpu_memory.html" history="1" highlightClick="0" endSnd="0">
+                <a:hlinkClick r:id="rId1" invalidUrl="" action="" tgtFrame="" tooltip="https://devops0906.github.io/AI_CAMPUS/os-day2/anim/fork_cpu_memory.html" history="1" highlightClick="0" endSnd="0">
                   <a:extLst>
                     <a:ext uri="{A12FA001-AC4F-418D-AE19-62706E023703}">
                       <ahyp:hlinkClr xmlns:ahyp="http://schemas.microsoft.com/office/drawing/2018/hyperlinkcolor" val="tx"/>
@@ -5323,7 +5323,7 @@
       <p:sp>
         <p:nvSpPr>
           <p:cNvPr id="13" name="Text 11">
-            <a:hlinkClick r:id="rId2" tooltip="https://imguru-mooc.github.io/AI_CAMPUS/os-day2/anim/worksheet.html"/>
+            <a:hlinkClick r:id="rId2" tooltip="https://devops0906.github.io/AI_CAMPUS/os-day2/anim/worksheet.html"/>
           </p:cNvPr>
           <p:cNvSpPr txBox="1"/>
           <p:nvPr/>
@@ -5351,7 +5351,7 @@
                 <a:solidFill>
                   <a:srgbClr val="1E2761"/>
                 </a:solidFill>
-                <a:hlinkClick r:id="rId2" invalidUrl="" action="" tgtFrame="" tooltip="https://imguru-mooc.github.io/AI_CAMPUS/os-day2/anim/worksheet.html" history="1" highlightClick="0" endSnd="0">
+                <a:hlinkClick r:id="rId2" invalidUrl="" action="" tgtFrame="" tooltip="https://devops0906.github.io/AI_CAMPUS/os-day2/anim/worksheet.html" history="1" highlightClick="0" endSnd="0">
                   <a:extLst>
                     <a:ext uri="{A12FA001-AC4F-418D-AE19-62706E023703}">
                       <ahyp:hlinkClr xmlns:ahyp="http://schemas.microsoft.com/office/drawing/2018/hyperlinkcolor" val="tx"/>
@@ -7088,7 +7088,7 @@
       <p:sp>
         <p:nvSpPr>
           <p:cNvPr id="11" name="Text 9">
-            <a:hlinkClick r:id="rId1" tooltip="https://imguru-mooc.github.io/AI_CAMPUS/os-day2/anim/execve_cpu_memory.html"/>
+            <a:hlinkClick r:id="rId1" tooltip="https://devops0906.github.io/AI_CAMPUS/os-day2/anim/execve_cpu_memory.html"/>
           </p:cNvPr>
           <p:cNvSpPr txBox="1"/>
           <p:nvPr/>
@@ -7116,7 +7116,7 @@
                 <a:solidFill>
                   <a:srgbClr val="1E2761"/>
                 </a:solidFill>
-                <a:hlinkClick r:id="rId1" invalidUrl="" action="" tgtFrame="" tooltip="https://imguru-mooc.github.io/AI_CAMPUS/os-day2/anim/execve_cpu_memory.html" history="1" highlightClick="0" endSnd="0">
+                <a:hlinkClick r:id="rId1" invalidUrl="" action="" tgtFrame="" tooltip="https://devops0906.github.io/AI_CAMPUS/os-day2/anim/execve_cpu_memory.html" history="1" highlightClick="0" endSnd="0">
                   <a:extLst>
                     <a:ext uri="{A12FA001-AC4F-418D-AE19-62706E023703}">
                       <ahyp:hlinkClr xmlns:ahyp="http://schemas.microsoft.com/office/drawing/2018/hyperlinkcolor" val="tx"/>
@@ -7160,7 +7160,7 @@
       <p:sp>
         <p:nvSpPr>
           <p:cNvPr id="13" name="Text 11">
-            <a:hlinkClick r:id="rId2" tooltip="https://imguru-mooc.github.io/AI_CAMPUS/os-day2/anim/wait_internals.html"/>
+            <a:hlinkClick r:id="rId2" tooltip="https://devops0906.github.io/AI_CAMPUS/os-day2/anim/wait_internals.html"/>
           </p:cNvPr>
           <p:cNvSpPr txBox="1"/>
           <p:nvPr/>
@@ -7188,7 +7188,7 @@
                 <a:solidFill>
                   <a:srgbClr val="1E2761"/>
                 </a:solidFill>
-                <a:hlinkClick r:id="rId2" invalidUrl="" action="" tgtFrame="" tooltip="https://imguru-mooc.github.io/AI_CAMPUS/os-day2/anim/wait_internals.html" history="1" highlightClick="0" endSnd="0">
+                <a:hlinkClick r:id="rId2" invalidUrl="" action="" tgtFrame="" tooltip="https://devops0906.github.io/AI_CAMPUS/os-day2/anim/wait_internals.html" history="1" highlightClick="0" endSnd="0">
                   <a:extLst>
                     <a:ext uri="{A12FA001-AC4F-418D-AE19-62706E023703}">
                       <ahyp:hlinkClr xmlns:ahyp="http://schemas.microsoft.com/office/drawing/2018/hyperlinkcolor" val="tx"/>
@@ -7232,7 +7232,7 @@
       <p:sp>
         <p:nvSpPr>
           <p:cNvPr id="15" name="Text 13">
-            <a:hlinkClick r:id="rId3" tooltip="https://imguru-mooc.github.io/AI_CAMPUS/os-day2/anim/worksheet.html"/>
+            <a:hlinkClick r:id="rId3" tooltip="https://devops0906.github.io/AI_CAMPUS/os-day2/anim/worksheet.html"/>
           </p:cNvPr>
           <p:cNvSpPr txBox="1"/>
           <p:nvPr/>
@@ -7260,7 +7260,7 @@
                 <a:solidFill>
                   <a:srgbClr val="1E2761"/>
                 </a:solidFill>
-                <a:hlinkClick r:id="rId3" invalidUrl="" action="" tgtFrame="" tooltip="https://imguru-mooc.github.io/AI_CAMPUS/os-day2/anim/worksheet.html" history="1" highlightClick="0" endSnd="0">
+                <a:hlinkClick r:id="rId3" invalidUrl="" action="" tgtFrame="" tooltip="https://devops0906.github.io/AI_CAMPUS/os-day2/anim/worksheet.html" history="1" highlightClick="0" endSnd="0">
                   <a:extLst>
                     <a:ext uri="{A12FA001-AC4F-418D-AE19-62706E023703}">
                       <ahyp:hlinkClr xmlns:ahyp="http://schemas.microsoft.com/office/drawing/2018/hyperlinkcolor" val="tx"/>
@@ -8959,7 +8959,7 @@
       <p:sp>
         <p:nvSpPr>
           <p:cNvPr id="11" name="Text 9">
-            <a:hlinkClick r:id="rId1" tooltip="https://imguru-mooc.github.io/AI_CAMPUS/os-day2/anim/linux_on_scheduler.html"/>
+            <a:hlinkClick r:id="rId1" tooltip="https://devops0906.github.io/AI_CAMPUS/os-day2/anim/linux_on_scheduler.html"/>
           </p:cNvPr>
           <p:cNvSpPr txBox="1"/>
           <p:nvPr/>
@@ -8987,7 +8987,7 @@
                 <a:solidFill>
                   <a:srgbClr val="1E2761"/>
                 </a:solidFill>
-                <a:hlinkClick r:id="rId1" invalidUrl="" action="" tgtFrame="" tooltip="https://imguru-mooc.github.io/AI_CAMPUS/os-day2/anim/linux_on_scheduler.html" history="1" highlightClick="0" endSnd="0">
+                <a:hlinkClick r:id="rId1" invalidUrl="" action="" tgtFrame="" tooltip="https://devops0906.github.io/AI_CAMPUS/os-day2/anim/linux_on_scheduler.html" history="1" highlightClick="0" endSnd="0">
                   <a:extLst>
                     <a:ext uri="{A12FA001-AC4F-418D-AE19-62706E023703}">
                       <ahyp:hlinkClr xmlns:ahyp="http://schemas.microsoft.com/office/drawing/2018/hyperlinkcolor" val="tx"/>
@@ -9031,7 +9031,7 @@
       <p:sp>
         <p:nvSpPr>
           <p:cNvPr id="13" name="Text 11">
-            <a:hlinkClick r:id="rId2" tooltip="https://imguru-mooc.github.io/AI_CAMPUS/os-day2/anim/linux_o1_scheduler.html"/>
+            <a:hlinkClick r:id="rId2" tooltip="https://devops0906.github.io/AI_CAMPUS/os-day2/anim/linux_o1_scheduler.html"/>
           </p:cNvPr>
           <p:cNvSpPr txBox="1"/>
           <p:nvPr/>
@@ -9059,7 +9059,7 @@
                 <a:solidFill>
                   <a:srgbClr val="1E2761"/>
                 </a:solidFill>
-                <a:hlinkClick r:id="rId2" invalidUrl="" action="" tgtFrame="" tooltip="https://imguru-mooc.github.io/AI_CAMPUS/os-day2/anim/linux_o1_scheduler.html" history="1" highlightClick="0" endSnd="0">
+                <a:hlinkClick r:id="rId2" invalidUrl="" action="" tgtFrame="" tooltip="https://devops0906.github.io/AI_CAMPUS/os-day2/anim/linux_o1_scheduler.html" history="1" highlightClick="0" endSnd="0">
                   <a:extLst>
                     <a:ext uri="{A12FA001-AC4F-418D-AE19-62706E023703}">
                       <ahyp:hlinkClr xmlns:ahyp="http://schemas.microsoft.com/office/drawing/2018/hyperlinkcolor" val="tx"/>
@@ -9103,7 +9103,7 @@
       <p:sp>
         <p:nvSpPr>
           <p:cNvPr id="15" name="Text 13">
-            <a:hlinkClick r:id="rId3" tooltip="https://imguru-mooc.github.io/AI_CAMPUS/os-day2/anim/worksheet.html"/>
+            <a:hlinkClick r:id="rId3" tooltip="https://devops0906.github.io/AI_CAMPUS/os-day2/anim/worksheet.html"/>
           </p:cNvPr>
           <p:cNvSpPr txBox="1"/>
           <p:nvPr/>
@@ -9131,7 +9131,7 @@
                 <a:solidFill>
                   <a:srgbClr val="1E2761"/>
                 </a:solidFill>
-                <a:hlinkClick r:id="rId3" invalidUrl="" action="" tgtFrame="" tooltip="https://imguru-mooc.github.io/AI_CAMPUS/os-day2/anim/worksheet.html" history="1" highlightClick="0" endSnd="0">
+                <a:hlinkClick r:id="rId3" invalidUrl="" action="" tgtFrame="" tooltip="https://devops0906.github.io/AI_CAMPUS/os-day2/anim/worksheet.html" history="1" highlightClick="0" endSnd="0">
                   <a:extLst>
                     <a:ext uri="{A12FA001-AC4F-418D-AE19-62706E023703}">
                       <ahyp:hlinkClr xmlns:ahyp="http://schemas.microsoft.com/office/drawing/2018/hyperlinkcolor" val="tx"/>
@@ -11308,7 +11308,7 @@
       <p:sp>
         <p:nvSpPr>
           <p:cNvPr id="11" name="Text 9">
-            <a:hlinkClick r:id="rId1" tooltip="https://imguru-mooc.github.io/AI_CAMPUS/os-day2/anim/linux_cfs_scheduler.html"/>
+            <a:hlinkClick r:id="rId1" tooltip="https://devops0906.github.io/AI_CAMPUS/os-day2/anim/linux_cfs_scheduler.html"/>
           </p:cNvPr>
           <p:cNvSpPr txBox="1"/>
           <p:nvPr/>
@@ -11336,7 +11336,7 @@
                 <a:solidFill>
                   <a:srgbClr val="1E2761"/>
                 </a:solidFill>
-                <a:hlinkClick r:id="rId1" invalidUrl="" action="" tgtFrame="" tooltip="https://imguru-mooc.github.io/AI_CAMPUS/os-day2/anim/linux_cfs_scheduler.html" history="1" highlightClick="0" endSnd="0">
+                <a:hlinkClick r:id="rId1" invalidUrl="" action="" tgtFrame="" tooltip="https://devops0906.github.io/AI_CAMPUS/os-day2/anim/linux_cfs_scheduler.html" history="1" highlightClick="0" endSnd="0">
                   <a:extLst>
                     <a:ext uri="{A12FA001-AC4F-418D-AE19-62706E023703}">
                       <ahyp:hlinkClr xmlns:ahyp="http://schemas.microsoft.com/office/drawing/2018/hyperlinkcolor" val="tx"/>
@@ -11380,7 +11380,7 @@
       <p:sp>
         <p:nvSpPr>
           <p:cNvPr id="13" name="Text 11">
-            <a:hlinkClick r:id="rId2" tooltip="https://imguru-mooc.github.io/AI_CAMPUS/os-day2/anim/rb_tree_insert_delete.html"/>
+            <a:hlinkClick r:id="rId2" tooltip="https://devops0906.github.io/AI_CAMPUS/os-day2/anim/rb_tree_insert_delete.html"/>
           </p:cNvPr>
           <p:cNvSpPr txBox="1"/>
           <p:nvPr/>
@@ -11408,7 +11408,7 @@
                 <a:solidFill>
                   <a:srgbClr val="1E2761"/>
                 </a:solidFill>
-                <a:hlinkClick r:id="rId2" invalidUrl="" action="" tgtFrame="" tooltip="https://imguru-mooc.github.io/AI_CAMPUS/os-day2/anim/rb_tree_insert_delete.html" history="1" highlightClick="0" endSnd="0">
+                <a:hlinkClick r:id="rId2" invalidUrl="" action="" tgtFrame="" tooltip="https://devops0906.github.io/AI_CAMPUS/os-day2/anim/rb_tree_insert_delete.html" history="1" highlightClick="0" endSnd="0">
                   <a:extLst>
                     <a:ext uri="{A12FA001-AC4F-418D-AE19-62706E023703}">
                       <ahyp:hlinkClr xmlns:ahyp="http://schemas.microsoft.com/office/drawing/2018/hyperlinkcolor" val="tx"/>
@@ -11452,7 +11452,7 @@
       <p:sp>
         <p:nvSpPr>
           <p:cNvPr id="15" name="Text 13">
-            <a:hlinkClick r:id="rId3" tooltip="https://imguru-mooc.github.io/AI_CAMPUS/os-day2/anim/worksheet.html"/>
+            <a:hlinkClick r:id="rId3" tooltip="https://devops0906.github.io/AI_CAMPUS/os-day2/anim/worksheet.html"/>
           </p:cNvPr>
           <p:cNvSpPr txBox="1"/>
           <p:nvPr/>
@@ -11480,7 +11480,7 @@
                 <a:solidFill>
                   <a:srgbClr val="1E2761"/>
                 </a:solidFill>
-                <a:hlinkClick r:id="rId3" invalidUrl="" action="" tgtFrame="" tooltip="https://imguru-mooc.github.io/AI_CAMPUS/os-day2/anim/worksheet.html" history="1" highlightClick="0" endSnd="0">
+                <a:hlinkClick r:id="rId3" invalidUrl="" action="" tgtFrame="" tooltip="https://devops0906.github.io/AI_CAMPUS/os-day2/anim/worksheet.html" history="1" highlightClick="0" endSnd="0">
                   <a:extLst>
                     <a:ext uri="{A12FA001-AC4F-418D-AE19-62706E023703}">
                       <ahyp:hlinkClr xmlns:ahyp="http://schemas.microsoft.com/office/drawing/2018/hyperlinkcolor" val="tx"/>
@@ -13162,7 +13162,7 @@
       <p:sp>
         <p:nvSpPr>
           <p:cNvPr id="11" name="Text 9">
-            <a:hlinkClick r:id="rId1" tooltip="https://imguru-mooc.github.io/AI_CAMPUS/os-day2/anim/buddy_system.html"/>
+            <a:hlinkClick r:id="rId1" tooltip="https://devops0906.github.io/AI_CAMPUS/os-day2/anim/buddy_system.html"/>
           </p:cNvPr>
           <p:cNvSpPr txBox="1"/>
           <p:nvPr/>
@@ -13190,7 +13190,7 @@
                 <a:solidFill>
                   <a:srgbClr val="1E2761"/>
                 </a:solidFill>
-                <a:hlinkClick r:id="rId1" invalidUrl="" action="" tgtFrame="" tooltip="https://imguru-mooc.github.io/AI_CAMPUS/os-day2/anim/buddy_system.html" history="1" highlightClick="0" endSnd="0">
+                <a:hlinkClick r:id="rId1" invalidUrl="" action="" tgtFrame="" tooltip="https://devops0906.github.io/AI_CAMPUS/os-day2/anim/buddy_system.html" history="1" highlightClick="0" endSnd="0">
                   <a:extLst>
                     <a:ext uri="{A12FA001-AC4F-418D-AE19-62706E023703}">
                       <ahyp:hlinkClr xmlns:ahyp="http://schemas.microsoft.com/office/drawing/2018/hyperlinkcolor" val="tx"/>
@@ -13234,7 +13234,7 @@
       <p:sp>
         <p:nvSpPr>
           <p:cNvPr id="13" name="Text 11">
-            <a:hlinkClick r:id="rId2" tooltip="https://imguru-mooc.github.io/AI_CAMPUS/os-day2/anim/buddy_alloc_free.html"/>
+            <a:hlinkClick r:id="rId2" tooltip="https://devops0906.github.io/AI_CAMPUS/os-day2/anim/buddy_alloc_free.html"/>
           </p:cNvPr>
           <p:cNvSpPr txBox="1"/>
           <p:nvPr/>
@@ -13262,7 +13262,7 @@
                 <a:solidFill>
                   <a:srgbClr val="1E2761"/>
                 </a:solidFill>
-                <a:hlinkClick r:id="rId2" invalidUrl="" action="" tgtFrame="" tooltip="https://imguru-mooc.github.io/AI_CAMPUS/os-day2/anim/buddy_alloc_free.html" history="1" highlightClick="0" endSnd="0">
+                <a:hlinkClick r:id="rId2" invalidUrl="" action="" tgtFrame="" tooltip="https://devops0906.github.io/AI_CAMPUS/os-day2/anim/buddy_alloc_free.html" history="1" highlightClick="0" endSnd="0">
                   <a:extLst>
                     <a:ext uri="{A12FA001-AC4F-418D-AE19-62706E023703}">
                       <ahyp:hlinkClr xmlns:ahyp="http://schemas.microsoft.com/office/drawing/2018/hyperlinkcolor" val="tx"/>
@@ -13306,7 +13306,7 @@
       <p:sp>
         <p:nvSpPr>
           <p:cNvPr id="15" name="Text 13">
-            <a:hlinkClick r:id="rId3" tooltip="https://imguru-mooc.github.io/AI_CAMPUS/os-day2/anim/slab_allocator.html"/>
+            <a:hlinkClick r:id="rId3" tooltip="https://devops0906.github.io/AI_CAMPUS/os-day2/anim/slab_allocator.html"/>
           </p:cNvPr>
           <p:cNvSpPr txBox="1"/>
           <p:nvPr/>
@@ -13334,7 +13334,7 @@
                 <a:solidFill>
                   <a:srgbClr val="1E2761"/>
                 </a:solidFill>
-                <a:hlinkClick r:id="rId3" invalidUrl="" action="" tgtFrame="" tooltip="https://imguru-mooc.github.io/AI_CAMPUS/os-day2/anim/slab_allocator.html" history="1" highlightClick="0" endSnd="0">
+                <a:hlinkClick r:id="rId3" invalidUrl="" action="" tgtFrame="" tooltip="https://devops0906.github.io/AI_CAMPUS/os-day2/anim/slab_allocator.html" history="1" highlightClick="0" endSnd="0">
                   <a:extLst>
                     <a:ext uri="{A12FA001-AC4F-418D-AE19-62706E023703}">
                       <ahyp:hlinkClr xmlns:ahyp="http://schemas.microsoft.com/office/drawing/2018/hyperlinkcolor" val="tx"/>
@@ -13378,7 +13378,7 @@
       <p:sp>
         <p:nvSpPr>
           <p:cNvPr id="17" name="Text 15">
-            <a:hlinkClick r:id="rId4" tooltip="https://imguru-mooc.github.io/AI_CAMPUS/os-day2/anim/worksheet.html"/>
+            <a:hlinkClick r:id="rId4" tooltip="https://devops0906.github.io/AI_CAMPUS/os-day2/anim/worksheet.html"/>
           </p:cNvPr>
           <p:cNvSpPr txBox="1"/>
           <p:nvPr/>
@@ -13406,7 +13406,7 @@
                 <a:solidFill>
                   <a:srgbClr val="1E2761"/>
                 </a:solidFill>
-                <a:hlinkClick r:id="rId4" invalidUrl="" action="" tgtFrame="" tooltip="https://imguru-mooc.github.io/AI_CAMPUS/os-day2/anim/worksheet.html" history="1" highlightClick="0" endSnd="0">
+                <a:hlinkClick r:id="rId4" invalidUrl="" action="" tgtFrame="" tooltip="https://devops0906.github.io/AI_CAMPUS/os-day2/anim/worksheet.html" history="1" highlightClick="0" endSnd="0">
                   <a:extLst>
                     <a:ext uri="{A12FA001-AC4F-418D-AE19-62706E023703}">
                       <ahyp:hlinkClr xmlns:ahyp="http://schemas.microsoft.com/office/drawing/2018/hyperlinkcolor" val="tx"/>
@@ -16480,7 +16480,7 @@
       <p:sp>
         <p:nvSpPr>
           <p:cNvPr id="11" name="Text 9">
-            <a:hlinkClick r:id="rId1" tooltip="https://imguru-mooc.github.io/AI_CAMPUS/os-day2/anim/x86_2level_pgd_pte.html"/>
+            <a:hlinkClick r:id="rId1" tooltip="https://devops0906.github.io/AI_CAMPUS/os-day2/anim/x86_2level_pgd_pte.html"/>
           </p:cNvPr>
           <p:cNvSpPr txBox="1"/>
           <p:nvPr/>
@@ -16508,7 +16508,7 @@
                 <a:solidFill>
                   <a:srgbClr val="1E2761"/>
                 </a:solidFill>
-                <a:hlinkClick r:id="rId1" invalidUrl="" action="" tgtFrame="" tooltip="https://imguru-mooc.github.io/AI_CAMPUS/os-day2/anim/x86_2level_pgd_pte.html" history="1" highlightClick="0" endSnd="0">
+                <a:hlinkClick r:id="rId1" invalidUrl="" action="" tgtFrame="" tooltip="https://devops0906.github.io/AI_CAMPUS/os-day2/anim/x86_2level_pgd_pte.html" history="1" highlightClick="0" endSnd="0">
                   <a:extLst>
                     <a:ext uri="{A12FA001-AC4F-418D-AE19-62706E023703}">
                       <ahyp:hlinkClr xmlns:ahyp="http://schemas.microsoft.com/office/drawing/2018/hyperlinkcolor" val="tx"/>
@@ -16552,7 +16552,7 @@
       <p:sp>
         <p:nvSpPr>
           <p:cNvPr id="13" name="Text 11">
-            <a:hlinkClick r:id="rId2" tooltip="https://imguru-mooc.github.io/AI_CAMPUS/os-day2/anim/x86_paging_map.html"/>
+            <a:hlinkClick r:id="rId2" tooltip="https://devops0906.github.io/AI_CAMPUS/os-day2/anim/x86_paging_map.html"/>
           </p:cNvPr>
           <p:cNvSpPr txBox="1"/>
           <p:nvPr/>
@@ -16580,7 +16580,7 @@
                 <a:solidFill>
                   <a:srgbClr val="1E2761"/>
                 </a:solidFill>
-                <a:hlinkClick r:id="rId2" invalidUrl="" action="" tgtFrame="" tooltip="https://imguru-mooc.github.io/AI_CAMPUS/os-day2/anim/x86_paging_map.html" history="1" highlightClick="0" endSnd="0">
+                <a:hlinkClick r:id="rId2" invalidUrl="" action="" tgtFrame="" tooltip="https://devops0906.github.io/AI_CAMPUS/os-day2/anim/x86_paging_map.html" history="1" highlightClick="0" endSnd="0">
                   <a:extLst>
                     <a:ext uri="{A12FA001-AC4F-418D-AE19-62706E023703}">
                       <ahyp:hlinkClr xmlns:ahyp="http://schemas.microsoft.com/office/drawing/2018/hyperlinkcolor" val="tx"/>
@@ -16624,7 +16624,7 @@
       <p:sp>
         <p:nvSpPr>
           <p:cNvPr id="15" name="Text 13">
-            <a:hlinkClick r:id="rId3" tooltip="https://imguru-mooc.github.io/AI_CAMPUS/os-day2/anim/vma_interval_tree.html"/>
+            <a:hlinkClick r:id="rId3" tooltip="https://devops0906.github.io/AI_CAMPUS/os-day2/anim/vma_interval_tree.html"/>
           </p:cNvPr>
           <p:cNvSpPr txBox="1"/>
           <p:nvPr/>
@@ -16652,7 +16652,7 @@
                 <a:solidFill>
                   <a:srgbClr val="1E2761"/>
                 </a:solidFill>
-                <a:hlinkClick r:id="rId3" invalidUrl="" action="" tgtFrame="" tooltip="https://imguru-mooc.github.io/AI_CAMPUS/os-day2/anim/vma_interval_tree.html" history="1" highlightClick="0" endSnd="0">
+                <a:hlinkClick r:id="rId3" invalidUrl="" action="" tgtFrame="" tooltip="https://devops0906.github.io/AI_CAMPUS/os-day2/anim/vma_interval_tree.html" history="1" highlightClick="0" endSnd="0">
                   <a:extLst>
                     <a:ext uri="{A12FA001-AC4F-418D-AE19-62706E023703}">
                       <ahyp:hlinkClr xmlns:ahyp="http://schemas.microsoft.com/office/drawing/2018/hyperlinkcolor" val="tx"/>
@@ -16696,7 +16696,7 @@
       <p:sp>
         <p:nvSpPr>
           <p:cNvPr id="17" name="Text 15">
-            <a:hlinkClick r:id="rId4" tooltip="https://imguru-mooc.github.io/AI_CAMPUS/os-day2/anim/linux_lru.html"/>
+            <a:hlinkClick r:id="rId4" tooltip="https://devops0906.github.io/AI_CAMPUS/os-day2/anim/linux_lru.html"/>
           </p:cNvPr>
           <p:cNvSpPr txBox="1"/>
           <p:nvPr/>
@@ -16724,7 +16724,7 @@
                 <a:solidFill>
                   <a:srgbClr val="1E2761"/>
                 </a:solidFill>
-                <a:hlinkClick r:id="rId4" invalidUrl="" action="" tgtFrame="" tooltip="https://imguru-mooc.github.io/AI_CAMPUS/os-day2/anim/linux_lru.html" history="1" highlightClick="0" endSnd="0">
+                <a:hlinkClick r:id="rId4" invalidUrl="" action="" tgtFrame="" tooltip="https://devops0906.github.io/AI_CAMPUS/os-day2/anim/linux_lru.html" history="1" highlightClick="0" endSnd="0">
                   <a:extLst>
                     <a:ext uri="{A12FA001-AC4F-418D-AE19-62706E023703}">
                       <ahyp:hlinkClr xmlns:ahyp="http://schemas.microsoft.com/office/drawing/2018/hyperlinkcolor" val="tx"/>
@@ -16768,7 +16768,7 @@
       <p:sp>
         <p:nvSpPr>
           <p:cNvPr id="19" name="Text 17">
-            <a:hlinkClick r:id="rId5" tooltip="https://imguru-mooc.github.io/AI_CAMPUS/os-day2/anim/interval_tree_ops.html"/>
+            <a:hlinkClick r:id="rId5" tooltip="https://devops0906.github.io/AI_CAMPUS/os-day2/anim/interval_tree_ops.html"/>
           </p:cNvPr>
           <p:cNvSpPr txBox="1"/>
           <p:nvPr/>
@@ -16796,7 +16796,7 @@
                 <a:solidFill>
                   <a:srgbClr val="1E2761"/>
                 </a:solidFill>
-                <a:hlinkClick r:id="rId5" invalidUrl="" action="" tgtFrame="" tooltip="https://imguru-mooc.github.io/AI_CAMPUS/os-day2/anim/interval_tree_ops.html" history="1" highlightClick="0" endSnd="0">
+                <a:hlinkClick r:id="rId5" invalidUrl="" action="" tgtFrame="" tooltip="https://devops0906.github.io/AI_CAMPUS/os-day2/anim/interval_tree_ops.html" history="1" highlightClick="0" endSnd="0">
                   <a:extLst>
                     <a:ext uri="{A12FA001-AC4F-418D-AE19-62706E023703}">
                       <ahyp:hlinkClr xmlns:ahyp="http://schemas.microsoft.com/office/drawing/2018/hyperlinkcolor" val="tx"/>
@@ -16840,7 +16840,7 @@
       <p:sp>
         <p:nvSpPr>
           <p:cNvPr id="21" name="Text 19">
-            <a:hlinkClick r:id="rId6" tooltip="https://imguru-mooc.github.io/AI_CAMPUS/os-day2/anim/worksheet.html"/>
+            <a:hlinkClick r:id="rId6" tooltip="https://devops0906.github.io/AI_CAMPUS/os-day2/anim/worksheet.html"/>
           </p:cNvPr>
           <p:cNvSpPr txBox="1"/>
           <p:nvPr/>
@@ -16868,7 +16868,7 @@
                 <a:solidFill>
                   <a:srgbClr val="1E2761"/>
                 </a:solidFill>
-                <a:hlinkClick r:id="rId6" invalidUrl="" action="" tgtFrame="" tooltip="https://imguru-mooc.github.io/AI_CAMPUS/os-day2/anim/worksheet.html" history="1" highlightClick="0" endSnd="0">
+                <a:hlinkClick r:id="rId6" invalidUrl="" action="" tgtFrame="" tooltip="https://devops0906.github.io/AI_CAMPUS/os-day2/anim/worksheet.html" history="1" highlightClick="0" endSnd="0">
                   <a:extLst>
                     <a:ext uri="{A12FA001-AC4F-418D-AE19-62706E023703}">
                       <ahyp:hlinkClr xmlns:ahyp="http://schemas.microsoft.com/office/drawing/2018/hyperlinkcolor" val="tx"/>
@@ -18414,7 +18414,7 @@
       <p:sp>
         <p:nvSpPr>
           <p:cNvPr id="11" name="Text 9">
-            <a:hlinkClick r:id="rId1" tooltip="https://imguru-mooc.github.io/AI_CAMPUS/os-day2/anim/index.html"/>
+            <a:hlinkClick r:id="rId1" tooltip="https://devops0906.github.io/AI_CAMPUS/os-day2/anim/index.html"/>
           </p:cNvPr>
           <p:cNvSpPr txBox="1"/>
           <p:nvPr/>
@@ -18442,7 +18442,7 @@
                 <a:solidFill>
                   <a:srgbClr val="1E2761"/>
                 </a:solidFill>
-                <a:hlinkClick r:id="rId1" invalidUrl="" action="" tgtFrame="" tooltip="https://imguru-mooc.github.io/AI_CAMPUS/os-day2/anim/index.html" history="1" highlightClick="0" endSnd="0">
+                <a:hlinkClick r:id="rId1" invalidUrl="" action="" tgtFrame="" tooltip="https://devops0906.github.io/AI_CAMPUS/os-day2/anim/index.html" history="1" highlightClick="0" endSnd="0">
                   <a:extLst>
                     <a:ext uri="{A12FA001-AC4F-418D-AE19-62706E023703}">
                       <ahyp:hlinkClr xmlns:ahyp="http://schemas.microsoft.com/office/drawing/2018/hyperlinkcolor" val="tx"/>
@@ -18486,7 +18486,7 @@
       <p:sp>
         <p:nvSpPr>
           <p:cNvPr id="13" name="Text 11">
-            <a:hlinkClick r:id="rId2" tooltip="https://imguru-mooc.github.io/AI_CAMPUS/os-day2/anim/worksheet.html"/>
+            <a:hlinkClick r:id="rId2" tooltip="https://devops0906.github.io/AI_CAMPUS/os-day2/anim/worksheet.html"/>
           </p:cNvPr>
           <p:cNvSpPr txBox="1"/>
           <p:nvPr/>
@@ -18514,7 +18514,7 @@
                 <a:solidFill>
                   <a:srgbClr val="1E2761"/>
                 </a:solidFill>
-                <a:hlinkClick r:id="rId2" invalidUrl="" action="" tgtFrame="" tooltip="https://imguru-mooc.github.io/AI_CAMPUS/os-day2/anim/worksheet.html" history="1" highlightClick="0" endSnd="0">
+                <a:hlinkClick r:id="rId2" invalidUrl="" action="" tgtFrame="" tooltip="https://devops0906.github.io/AI_CAMPUS/os-day2/anim/worksheet.html" history="1" highlightClick="0" endSnd="0">
                   <a:extLst>
                     <a:ext uri="{A12FA001-AC4F-418D-AE19-62706E023703}">
                       <ahyp:hlinkClr xmlns:ahyp="http://schemas.microsoft.com/office/drawing/2018/hyperlinkcolor" val="tx"/>
@@ -20607,7 +20607,7 @@
       <p:sp>
         <p:nvSpPr>
           <p:cNvPr id="11" name="Text 9">
-            <a:hlinkClick r:id="rId1" tooltip="https://imguru-mooc.github.io/AI_CAMPUS/os-day2/anim/linux_process_lifecycle.html"/>
+            <a:hlinkClick r:id="rId1" tooltip="https://devops0906.github.io/AI_CAMPUS/os-day2/anim/linux_process_lifecycle.html"/>
           </p:cNvPr>
           <p:cNvSpPr txBox="1"/>
           <p:nvPr/>
@@ -20635,7 +20635,7 @@
                 <a:solidFill>
                   <a:srgbClr val="1E2761"/>
                 </a:solidFill>
-                <a:hlinkClick r:id="rId1" invalidUrl="" action="" tgtFrame="" tooltip="https://imguru-mooc.github.io/AI_CAMPUS/os-day2/anim/linux_process_lifecycle.html" history="1" highlightClick="0" endSnd="0">
+                <a:hlinkClick r:id="rId1" invalidUrl="" action="" tgtFrame="" tooltip="https://devops0906.github.io/AI_CAMPUS/os-day2/anim/linux_process_lifecycle.html" history="1" highlightClick="0" endSnd="0">
                   <a:extLst>
                     <a:ext uri="{A12FA001-AC4F-418D-AE19-62706E023703}">
                       <ahyp:hlinkClr xmlns:ahyp="http://schemas.microsoft.com/office/drawing/2018/hyperlinkcolor" val="tx"/>
@@ -20679,7 +20679,7 @@
       <p:sp>
         <p:nvSpPr>
           <p:cNvPr id="13" name="Text 11">
-            <a:hlinkClick r:id="rId2" tooltip="https://imguru-mooc.github.io/AI_CAMPUS/os-day2/anim/worksheet.html"/>
+            <a:hlinkClick r:id="rId2" tooltip="https://devops0906.github.io/AI_CAMPUS/os-day2/anim/worksheet.html"/>
           </p:cNvPr>
           <p:cNvSpPr txBox="1"/>
           <p:nvPr/>
@@ -20707,7 +20707,7 @@
                 <a:solidFill>
                   <a:srgbClr val="1E2761"/>
                 </a:solidFill>
-                <a:hlinkClick r:id="rId2" invalidUrl="" action="" tgtFrame="" tooltip="https://imguru-mooc.github.io/AI_CAMPUS/os-day2/anim/worksheet.html" history="1" highlightClick="0" endSnd="0">
+                <a:hlinkClick r:id="rId2" invalidUrl="" action="" tgtFrame="" tooltip="https://devops0906.github.io/AI_CAMPUS/os-day2/anim/worksheet.html" history="1" highlightClick="0" endSnd="0">
                   <a:extLst>
                     <a:ext uri="{A12FA001-AC4F-418D-AE19-62706E023703}">
                       <ahyp:hlinkClr xmlns:ahyp="http://schemas.microsoft.com/office/drawing/2018/hyperlinkcolor" val="tx"/>
